--- a/Schools_ML_Track/camp_2026/slides/ML/ML02.pptx
+++ b/Schools_ML_Track/camp_2026/slides/ML/ML02.pptx
@@ -128,7 +128,7 @@
   <p:extLst>
     <p:ext uri="{521415D9-36F7-43E2-AB2F-B90AF26B5E84}">
       <p14:sectionLst xmlns:p14="http://schemas.microsoft.com/office/powerpoint/2010/main">
-        <p14:section name="Opening" id="{b4f2a359-ccc8-84a0-0e71-a1dd9dbc7aa7}">
+        <p14:section name="Opening" id="{8d121c07-cabb-4ce3-52bc-0db781d03070}">
           <p14:sldIdLst>
             <p14:sldId id="256"/>
             <p14:sldId id="257"/>
@@ -139,7 +139,7 @@
             <p14:sldId id="262"/>
           </p14:sldIdLst>
         </p14:section>
-        <p14:section name="Block A" id="{8d86abbb-2690-6357-119a-22b114accad3}">
+        <p14:section name="Block A" id="{f29cb126-9a6c-8b32-b6da-b4008ebdf984}">
           <p14:sldIdLst>
             <p14:sldId id="263"/>
             <p14:sldId id="264"/>
@@ -149,15 +149,15 @@
             <p14:sldId id="269"/>
           </p14:sldIdLst>
         </p14:section>
-        <p14:section name="Break" id="{a4296514-36b6-d1be-ea01-67230602a388}">
+        <p14:section name="Break" id="{f5fd2c91-c0df-88b8-6140-35107c8e9c30}">
           <p14:sldIdLst>
             <p14:sldId id="267"/>
           </p14:sldIdLst>
         </p14:section>
-        <p14:section name="Block A" id="{bbcc1156-2099-98fc-e2a2-99f84fab5105}">
+        <p14:section name="Block A" id="{e09978c0-5cf0-0b32-5a9b-fb57aeef5dc7}">
           <p14:sldIdLst/>
         </p14:section>
-        <p14:section name="Block B" id="{a7421cbe-5685-304f-53fb-c1fc53516aa7}">
+        <p14:section name="Block B" id="{6bc0b679-ba9a-686b-27aa-a2485f325e6b}">
           <p14:sldIdLst>
             <p14:sldId id="270"/>
             <p14:sldId id="271"/>
@@ -166,7 +166,7 @@
             <p14:sldId id="274"/>
           </p14:sldIdLst>
         </p14:section>
-        <p14:section name="Make and close" id="{ec371056-0917-926b-5b40-034fac6968e5}">
+        <p14:section name="Make and close" id="{ad6cfddb-c529-f990-839c-dba6a98dd75c}">
           <p14:sldIdLst>
             <p14:sldId id="275"/>
             <p14:sldId id="276"/>

--- a/Schools_ML_Track/camp_2026/slides/ML/ML02.pptx
+++ b/Schools_ML_Track/camp_2026/slides/ML/ML02.pptx
@@ -128,7 +128,7 @@
   <p:extLst>
     <p:ext uri="{521415D9-36F7-43E2-AB2F-B90AF26B5E84}">
       <p14:sectionLst xmlns:p14="http://schemas.microsoft.com/office/powerpoint/2010/main">
-        <p14:section name="Opening" id="{8d121c07-cabb-4ce3-52bc-0db781d03070}">
+        <p14:section name="Opening" id="{5298563c-4c82-2259-a9f5-e27d1db78cb9}">
           <p14:sldIdLst>
             <p14:sldId id="256"/>
             <p14:sldId id="257"/>
@@ -139,7 +139,7 @@
             <p14:sldId id="262"/>
           </p14:sldIdLst>
         </p14:section>
-        <p14:section name="Block A" id="{f29cb126-9a6c-8b32-b6da-b4008ebdf984}">
+        <p14:section name="Block A" id="{5510139c-ca30-4041-d915-5be3a14ffa55}">
           <p14:sldIdLst>
             <p14:sldId id="263"/>
             <p14:sldId id="264"/>
@@ -149,15 +149,15 @@
             <p14:sldId id="269"/>
           </p14:sldIdLst>
         </p14:section>
-        <p14:section name="Break" id="{f5fd2c91-c0df-88b8-6140-35107c8e9c30}">
+        <p14:section name="Break" id="{948cc1cf-547d-e785-81f6-773891b4cdba}">
           <p14:sldIdLst>
             <p14:sldId id="267"/>
           </p14:sldIdLst>
         </p14:section>
-        <p14:section name="Block A" id="{e09978c0-5cf0-0b32-5a9b-fb57aeef5dc7}">
+        <p14:section name="Block A" id="{c5e87d69-8b25-5776-0edc-a32f6203968d}">
           <p14:sldIdLst/>
         </p14:section>
-        <p14:section name="Block B" id="{6bc0b679-ba9a-686b-27aa-a2485f325e6b}">
+        <p14:section name="Block B" id="{2460d0dc-ab09-7713-be9b-124d8a2c8095}">
           <p14:sldIdLst>
             <p14:sldId id="270"/>
             <p14:sldId id="271"/>
@@ -166,7 +166,7 @@
             <p14:sldId id="274"/>
           </p14:sldIdLst>
         </p14:section>
-        <p14:section name="Make and close" id="{ad6cfddb-c529-f990-839c-dba6a98dd75c}">
+        <p14:section name="Make and close" id="{9a2684b3-a180-a881-1da9-84e430a6d80f}">
           <p14:sldIdLst>
             <p14:sldId id="275"/>
             <p14:sldId id="276"/>
@@ -6691,15 +6691,15 @@
           <a:p>
             <a:pPr algn="l" indent="0" marL="0">
               <a:lnSpc>
-                <a:spcPts val="3600"/>
+                <a:spcPts val="3360"/>
               </a:lnSpc>
               <a:spcAft>
-                <a:spcPts val="2520"/>
+                <a:spcPts val="2020"/>
               </a:spcAft>
               <a:buNone/>
             </a:pPr>
             <a:r>
-              <a:rPr lang="en-US" sz="3000" dirty="0">
+              <a:rPr lang="en-US" sz="2800" dirty="0">
                 <a:solidFill>
                   <a:srgbClr val="111111"/>
                 </a:solidFill>
@@ -6707,22 +6707,22 @@
                 <a:ea typeface="Lato" pitchFamily="34" charset="-122"/>
                 <a:cs typeface="Lato" pitchFamily="34" charset="-120"/>
               </a:rPr>
-              <a:t>Create a decimal price of 2500.5 and a quantity of 2. Print the total. Write one sentence on why "2500.5" with quotation marks is different.</a:t>
-            </a:r>
-            <a:endParaRPr lang="en-US" sz="3000" dirty="0"/>
-          </a:p>
-          <a:p>
-            <a:pPr algn="l" indent="0" marL="0">
-              <a:lnSpc>
-                <a:spcPts val="3600"/>
+              <a:t>Create a decimal price of 2500.5 and a quantity of 2.</a:t>
+            </a:r>
+            <a:endParaRPr lang="en-US" sz="2800" dirty="0"/>
+          </a:p>
+          <a:p>
+            <a:pPr algn="l" indent="0" marL="0">
+              <a:lnSpc>
+                <a:spcPts val="3360"/>
               </a:lnSpc>
               <a:spcAft>
-                <a:spcPts val="2520"/>
+                <a:spcPts val="2020"/>
               </a:spcAft>
               <a:buNone/>
             </a:pPr>
             <a:r>
-              <a:rPr lang="en-US" sz="3000" dirty="0">
+              <a:rPr lang="en-US" sz="2800" dirty="0">
                 <a:solidFill>
                   <a:srgbClr val="111111"/>
                 </a:solidFill>
@@ -6730,9 +6730,55 @@
                 <a:ea typeface="Lato" pitchFamily="34" charset="-122"/>
                 <a:cs typeface="Lato" pitchFamily="34" charset="-120"/>
               </a:rPr>
+              <a:t>Print the total.</a:t>
+            </a:r>
+            <a:endParaRPr lang="en-US" sz="2800" dirty="0"/>
+          </a:p>
+          <a:p>
+            <a:pPr algn="l" indent="0" marL="0">
+              <a:lnSpc>
+                <a:spcPts val="3360"/>
+              </a:lnSpc>
+              <a:spcAft>
+                <a:spcPts val="2020"/>
+              </a:spcAft>
+              <a:buNone/>
+            </a:pPr>
+            <a:r>
+              <a:rPr lang="en-US" sz="2800" dirty="0">
+                <a:solidFill>
+                  <a:srgbClr val="111111"/>
+                </a:solidFill>
+                <a:latin typeface="Lato" pitchFamily="34" charset="0"/>
+                <a:ea typeface="Lato" pitchFamily="34" charset="-122"/>
+                <a:cs typeface="Lato" pitchFamily="34" charset="-120"/>
+              </a:rPr>
+              <a:t>Write one sentence on why "2500.5" with quotation marks is different.</a:t>
+            </a:r>
+            <a:endParaRPr lang="en-US" sz="2800" dirty="0"/>
+          </a:p>
+          <a:p>
+            <a:pPr algn="l" indent="0" marL="0">
+              <a:lnSpc>
+                <a:spcPts val="3360"/>
+              </a:lnSpc>
+              <a:spcAft>
+                <a:spcPts val="2020"/>
+              </a:spcAft>
+              <a:buNone/>
+            </a:pPr>
+            <a:r>
+              <a:rPr lang="en-US" sz="2800" dirty="0">
+                <a:solidFill>
+                  <a:srgbClr val="111111"/>
+                </a:solidFill>
+                <a:latin typeface="Lato" pitchFamily="34" charset="0"/>
+                <a:ea typeface="Lato" pitchFamily="34" charset="-122"/>
+                <a:cs typeface="Lato" pitchFamily="34" charset="-120"/>
+              </a:rPr>
               <a:t>Save it as ML02. Write two sentences: what you changed and how you checked it.</a:t>
             </a:r>
-            <a:endParaRPr lang="en-US" sz="3000" dirty="0"/>
+            <a:endParaRPr lang="en-US" sz="2800" dirty="0"/>
           </a:p>
         </p:txBody>
       </p:sp>
